--- a/slides/11-practicalities.pptx
+++ b/slides/11-practicalities.pptx
@@ -605,7 +605,7 @@
           </a:lstStyle>
           <a:p>
             <a:fld id="{024797A2-BD80-4098-897C-2566B331DA15}" type="datetimeFigureOut">
-              <a:t>9/23/2026</a:t>
+              <a:t>10/21/2026</a:t>
             </a:fld>
             <a:endParaRPr lang="en-GB"/>
           </a:p>
@@ -1055,7 +1055,7 @@
           <a:p>
             <a:fld id="{FB9B3B79-B3D0-4137-A0F5-AE3499504EDC}" type="slidenum">
               <a:rPr lang="en-GB"/>
-              <a:t>16</a:t>
+              <a:t>18</a:t>
             </a:fld>
             <a:endParaRPr lang="en-GB"/>
           </a:p>
@@ -1166,7 +1166,7 @@
           <a:p>
             <a:fld id="{FB9B3B79-B3D0-4137-A0F5-AE3499504EDC}" type="slidenum">
               <a:rPr lang="en-GB"/>
-              <a:t>17</a:t>
+              <a:t>19</a:t>
             </a:fld>
             <a:endParaRPr lang="en-GB"/>
           </a:p>
@@ -1316,7 +1316,7 @@
           <a:p>
             <a:fld id="{846CE7D5-CF57-46EF-B807-FDD0502418D4}" type="datetimeFigureOut">
               <a:rPr lang="en-GB" smtClean="0"/>
-              <a:t>23/09/2026</a:t>
+              <a:t>21/10/2026</a:t>
             </a:fld>
             <a:endParaRPr lang="en-GB"/>
           </a:p>
@@ -1486,7 +1486,7 @@
           <a:p>
             <a:fld id="{846CE7D5-CF57-46EF-B807-FDD0502418D4}" type="datetimeFigureOut">
               <a:rPr lang="en-GB" smtClean="0"/>
-              <a:t>23/09/2026</a:t>
+              <a:t>21/10/2026</a:t>
             </a:fld>
             <a:endParaRPr lang="en-GB"/>
           </a:p>
@@ -1666,7 +1666,7 @@
           <a:p>
             <a:fld id="{846CE7D5-CF57-46EF-B807-FDD0502418D4}" type="datetimeFigureOut">
               <a:rPr lang="en-GB" smtClean="0"/>
-              <a:t>23/09/2026</a:t>
+              <a:t>21/10/2026</a:t>
             </a:fld>
             <a:endParaRPr lang="en-GB"/>
           </a:p>
@@ -2212,7 +2212,7 @@
           <a:p>
             <a:fld id="{846CE7D5-CF57-46EF-B807-FDD0502418D4}" type="datetimeFigureOut">
               <a:rPr lang="en-GB" smtClean="0"/>
-              <a:t>23/09/2026</a:t>
+              <a:t>21/10/2026</a:t>
             </a:fld>
             <a:endParaRPr lang="en-GB"/>
           </a:p>
@@ -2458,7 +2458,7 @@
           <a:p>
             <a:fld id="{846CE7D5-CF57-46EF-B807-FDD0502418D4}" type="datetimeFigureOut">
               <a:rPr lang="en-GB" smtClean="0"/>
-              <a:t>23/09/2026</a:t>
+              <a:t>21/10/2026</a:t>
             </a:fld>
             <a:endParaRPr lang="en-GB"/>
           </a:p>
@@ -2690,7 +2690,7 @@
           <a:p>
             <a:fld id="{846CE7D5-CF57-46EF-B807-FDD0502418D4}" type="datetimeFigureOut">
               <a:rPr lang="en-GB" smtClean="0"/>
-              <a:t>23/09/2026</a:t>
+              <a:t>21/10/2026</a:t>
             </a:fld>
             <a:endParaRPr lang="en-GB"/>
           </a:p>
@@ -3057,7 +3057,7 @@
           <a:p>
             <a:fld id="{846CE7D5-CF57-46EF-B807-FDD0502418D4}" type="datetimeFigureOut">
               <a:rPr lang="en-GB" smtClean="0"/>
-              <a:t>23/09/2026</a:t>
+              <a:t>21/10/2026</a:t>
             </a:fld>
             <a:endParaRPr lang="en-GB"/>
           </a:p>
@@ -3175,7 +3175,7 @@
           <a:p>
             <a:fld id="{846CE7D5-CF57-46EF-B807-FDD0502418D4}" type="datetimeFigureOut">
               <a:rPr lang="en-GB" smtClean="0"/>
-              <a:t>23/09/2026</a:t>
+              <a:t>21/10/2026</a:t>
             </a:fld>
             <a:endParaRPr lang="en-GB"/>
           </a:p>
@@ -3270,7 +3270,7 @@
           <a:p>
             <a:fld id="{846CE7D5-CF57-46EF-B807-FDD0502418D4}" type="datetimeFigureOut">
               <a:rPr lang="en-GB" smtClean="0"/>
-              <a:t>23/09/2026</a:t>
+              <a:t>21/10/2026</a:t>
             </a:fld>
             <a:endParaRPr lang="en-GB"/>
           </a:p>
@@ -3547,7 +3547,7 @@
           <a:p>
             <a:fld id="{846CE7D5-CF57-46EF-B807-FDD0502418D4}" type="datetimeFigureOut">
               <a:rPr lang="en-GB" smtClean="0"/>
-              <a:t>23/09/2026</a:t>
+              <a:t>21/10/2026</a:t>
             </a:fld>
             <a:endParaRPr lang="en-GB"/>
           </a:p>
@@ -3804,7 +3804,7 @@
           <a:p>
             <a:fld id="{846CE7D5-CF57-46EF-B807-FDD0502418D4}" type="datetimeFigureOut">
               <a:rPr lang="en-GB" smtClean="0"/>
-              <a:t>23/09/2026</a:t>
+              <a:t>21/10/2026</a:t>
             </a:fld>
             <a:endParaRPr lang="en-GB"/>
           </a:p>
@@ -4017,7 +4017,7 @@
           <a:p>
             <a:fld id="{846CE7D5-CF57-46EF-B807-FDD0502418D4}" type="datetimeFigureOut">
               <a:rPr lang="en-GB" smtClean="0"/>
-              <a:t>23/09/2026</a:t>
+              <a:t>21/10/2026</a:t>
             </a:fld>
             <a:endParaRPr lang="en-GB"/>
           </a:p>
@@ -4563,8 +4563,13 @@
             </a:pPr>
             <a:r>
               <a:rPr lang="en-GB" dirty="0"/>
-              <a:t>"Strength"</a:t>
-            </a:r>
+              <a:t>"Strength“ or “water in the </a:t>
+            </a:r>
+            <a:r>
+              <a:rPr lang="en-GB"/>
+              <a:t>tap / utility”</a:t>
+            </a:r>
+            <a:endParaRPr lang="en-GB" dirty="0"/>
           </a:p>
           <a:p>
             <a:pPr marL="1218565" lvl="1" indent="-422910">
@@ -11893,7 +11898,7 @@
 </file>
 
 <file path=ppt/slides/slide5.xml><?xml version="1.0" encoding="utf-8"?>
-<p:sld xmlns:a="http://schemas.openxmlformats.org/drawingml/2006/main" xmlns:r="http://schemas.openxmlformats.org/officeDocument/2006/relationships" xmlns:p="http://schemas.openxmlformats.org/presentationml/2006/main">
+<p:sld xmlns:a="http://schemas.openxmlformats.org/drawingml/2006/main" xmlns:r="http://schemas.openxmlformats.org/officeDocument/2006/relationships" xmlns:p="http://schemas.openxmlformats.org/presentationml/2006/main" show="0">
   <p:cSld>
     <p:bg>
       <p:bgPr>
